--- a/analytical_distribution/presentation/neutrino_muc.pptx
+++ b/analytical_distribution/presentation/neutrino_muc.pptx
@@ -5,10 +5,10 @@
     <p:sldMasterId id="2147483648" r:id="rId1"/>
   </p:sldMasterIdLst>
   <p:notesMasterIdLst>
-    <p:notesMasterId r:id="rId18"/>
+    <p:notesMasterId r:id="rId19"/>
   </p:notesMasterIdLst>
   <p:handoutMasterIdLst>
-    <p:handoutMasterId r:id="rId19"/>
+    <p:handoutMasterId r:id="rId20"/>
   </p:handoutMasterIdLst>
   <p:sldIdLst>
     <p:sldId id="256" r:id="rId2"/>
@@ -21,12 +21,13 @@
     <p:sldId id="2019" r:id="rId9"/>
     <p:sldId id="2023" r:id="rId10"/>
     <p:sldId id="2020" r:id="rId11"/>
-    <p:sldId id="2021" r:id="rId12"/>
-    <p:sldId id="2022" r:id="rId13"/>
-    <p:sldId id="2017" r:id="rId14"/>
-    <p:sldId id="2013" r:id="rId15"/>
-    <p:sldId id="2012" r:id="rId16"/>
-    <p:sldId id="2016" r:id="rId17"/>
+    <p:sldId id="2024" r:id="rId12"/>
+    <p:sldId id="2021" r:id="rId13"/>
+    <p:sldId id="2022" r:id="rId14"/>
+    <p:sldId id="2017" r:id="rId15"/>
+    <p:sldId id="2013" r:id="rId16"/>
+    <p:sldId id="2012" r:id="rId17"/>
+    <p:sldId id="2016" r:id="rId18"/>
   </p:sldIdLst>
   <p:sldSz cx="12192000" cy="6858000"/>
   <p:notesSz cx="6858000" cy="9144000"/>
@@ -230,7 +231,7 @@
           <a:p>
             <a:fld id="{933A271B-0158-48D8-849A-F2122D5124BD}" type="datetimeFigureOut">
               <a:rPr lang="zh-CN" altLang="en-US" smtClean="0"/>
-              <a:t>2026/3/23</a:t>
+              <a:t>2026/4/6</a:t>
             </a:fld>
             <a:endParaRPr lang="zh-CN" altLang="en-US"/>
           </a:p>
@@ -407,7 +408,7 @@
           <a:p>
             <a:fld id="{9BAD00B9-4766-4E66-A103-86969EE48BDF}" type="datetimeFigureOut">
               <a:rPr lang="zh-CN" altLang="en-US" smtClean="0"/>
-              <a:t>2026/3/23</a:t>
+              <a:t>2026/4/6</a:t>
             </a:fld>
             <a:endParaRPr lang="zh-CN" altLang="en-US"/>
           </a:p>
@@ -4313,6 +4314,232 @@
           <a:chExt cx="0" cy="0"/>
         </a:xfrm>
       </p:grpSpPr>
+      <p:sp>
+        <p:nvSpPr>
+          <p:cNvPr id="2" name="标题 1">
+            <a:extLst>
+              <a:ext uri="{FF2B5EF4-FFF2-40B4-BE49-F238E27FC236}">
+                <a16:creationId xmlns:a16="http://schemas.microsoft.com/office/drawing/2014/main" id="{83D3ED4E-FED1-AEE0-CB58-647E57AAF999}"/>
+              </a:ext>
+            </a:extLst>
+          </p:cNvPr>
+          <p:cNvSpPr>
+            <a:spLocks noGrp="1"/>
+          </p:cNvSpPr>
+          <p:nvPr>
+            <p:ph type="title"/>
+          </p:nvPr>
+        </p:nvSpPr>
+        <p:spPr>
+          <a:xfrm>
+            <a:off x="0" y="56032"/>
+            <a:ext cx="10515600" cy="1325563"/>
+          </a:xfrm>
+        </p:spPr>
+        <p:txBody>
+          <a:bodyPr/>
+          <a:lstStyle/>
+          <a:p>
+            <a:r>
+              <a:rPr lang="en-US" altLang="zh-CN" dirty="0"/>
+              <a:t>No beam divergence, but chicane</a:t>
+            </a:r>
+            <a:endParaRPr lang="en-US" dirty="0"/>
+          </a:p>
+        </p:txBody>
+      </p:sp>
+      <p:pic>
+        <p:nvPicPr>
+          <p:cNvPr id="8" name="内容占位符 7">
+            <a:extLst>
+              <a:ext uri="{FF2B5EF4-FFF2-40B4-BE49-F238E27FC236}">
+                <a16:creationId xmlns:a16="http://schemas.microsoft.com/office/drawing/2014/main" id="{DBFCEBDD-7AE1-DBDD-3C2C-8F548E534549}"/>
+              </a:ext>
+            </a:extLst>
+          </p:cNvPr>
+          <p:cNvPicPr>
+            <a:picLocks noGrp="1" noChangeAspect="1"/>
+          </p:cNvPicPr>
+          <p:nvPr>
+            <p:ph idx="1"/>
+          </p:nvPr>
+        </p:nvPicPr>
+        <p:blipFill>
+          <a:blip r:embed="rId2"/>
+          <a:stretch>
+            <a:fillRect/>
+          </a:stretch>
+        </p:blipFill>
+        <p:spPr>
+          <a:xfrm>
+            <a:off x="1" y="1381595"/>
+            <a:ext cx="5556138" cy="3551013"/>
+          </a:xfrm>
+          <a:prstGeom prst="rect">
+            <a:avLst/>
+          </a:prstGeom>
+        </p:spPr>
+      </p:pic>
+      <p:sp>
+        <p:nvSpPr>
+          <p:cNvPr id="6" name="灯片编号占位符 5">
+            <a:extLst>
+              <a:ext uri="{FF2B5EF4-FFF2-40B4-BE49-F238E27FC236}">
+                <a16:creationId xmlns:a16="http://schemas.microsoft.com/office/drawing/2014/main" id="{35B471DB-0238-FB66-F865-FBB8BC7693BF}"/>
+              </a:ext>
+            </a:extLst>
+          </p:cNvPr>
+          <p:cNvSpPr>
+            <a:spLocks noGrp="1"/>
+          </p:cNvSpPr>
+          <p:nvPr>
+            <p:ph type="sldNum" sz="quarter" idx="12"/>
+          </p:nvPr>
+        </p:nvSpPr>
+        <p:spPr/>
+        <p:txBody>
+          <a:bodyPr/>
+          <a:lstStyle/>
+          <a:p>
+            <a:fld id="{6F9FE219-8C91-41EA-B415-E8E26B7A5CDA}" type="slidenum">
+              <a:rPr lang="zh-CN" altLang="en-US" smtClean="0"/>
+              <a:pPr/>
+              <a:t>11</a:t>
+            </a:fld>
+            <a:endParaRPr lang="zh-CN" altLang="en-US" dirty="0"/>
+          </a:p>
+        </p:txBody>
+      </p:sp>
+      <p:pic>
+        <p:nvPicPr>
+          <p:cNvPr id="10" name="图片 9">
+            <a:extLst>
+              <a:ext uri="{FF2B5EF4-FFF2-40B4-BE49-F238E27FC236}">
+                <a16:creationId xmlns:a16="http://schemas.microsoft.com/office/drawing/2014/main" id="{43F47A5A-A530-921B-CA4B-D52FDC6F6146}"/>
+              </a:ext>
+            </a:extLst>
+          </p:cNvPr>
+          <p:cNvPicPr>
+            <a:picLocks noChangeAspect="1"/>
+          </p:cNvPicPr>
+          <p:nvPr/>
+        </p:nvPicPr>
+        <p:blipFill>
+          <a:blip r:embed="rId3"/>
+          <a:stretch>
+            <a:fillRect/>
+          </a:stretch>
+        </p:blipFill>
+        <p:spPr>
+          <a:xfrm>
+            <a:off x="6043433" y="1381596"/>
+            <a:ext cx="5556138" cy="3551012"/>
+          </a:xfrm>
+          <a:prstGeom prst="rect">
+            <a:avLst/>
+          </a:prstGeom>
+        </p:spPr>
+      </p:pic>
+      <p:sp>
+        <p:nvSpPr>
+          <p:cNvPr id="11" name="文本框 10">
+            <a:extLst>
+              <a:ext uri="{FF2B5EF4-FFF2-40B4-BE49-F238E27FC236}">
+                <a16:creationId xmlns:a16="http://schemas.microsoft.com/office/drawing/2014/main" id="{1572EF45-1384-7EC4-92C4-FF7C2626CB07}"/>
+              </a:ext>
+            </a:extLst>
+          </p:cNvPr>
+          <p:cNvSpPr txBox="1"/>
+          <p:nvPr/>
+        </p:nvSpPr>
+        <p:spPr>
+          <a:xfrm>
+            <a:off x="811369" y="5293217"/>
+            <a:ext cx="3625403" cy="646331"/>
+          </a:xfrm>
+          <a:prstGeom prst="rect">
+            <a:avLst/>
+          </a:prstGeom>
+          <a:noFill/>
+        </p:spPr>
+        <p:txBody>
+          <a:bodyPr wrap="square" rtlCol="0">
+            <a:spAutoFit/>
+          </a:bodyPr>
+          <a:lstStyle/>
+          <a:p>
+            <a:r>
+              <a:rPr lang="en-US" dirty="0"/>
+              <a:t>Chicane: 2.5% has 0.5mrad; 2.5% has 1mrad angle</a:t>
+            </a:r>
+          </a:p>
+        </p:txBody>
+      </p:sp>
+      <p:sp>
+        <p:nvSpPr>
+          <p:cNvPr id="12" name="文本框 11">
+            <a:extLst>
+              <a:ext uri="{FF2B5EF4-FFF2-40B4-BE49-F238E27FC236}">
+                <a16:creationId xmlns:a16="http://schemas.microsoft.com/office/drawing/2014/main" id="{087CE41A-7FC5-886B-FC20-76034A774A0F}"/>
+              </a:ext>
+            </a:extLst>
+          </p:cNvPr>
+          <p:cNvSpPr txBox="1"/>
+          <p:nvPr/>
+        </p:nvSpPr>
+        <p:spPr>
+          <a:xfrm>
+            <a:off x="6797898" y="5321313"/>
+            <a:ext cx="3625403" cy="646331"/>
+          </a:xfrm>
+          <a:prstGeom prst="rect">
+            <a:avLst/>
+          </a:prstGeom>
+          <a:noFill/>
+        </p:spPr>
+        <p:txBody>
+          <a:bodyPr wrap="square" rtlCol="0">
+            <a:spAutoFit/>
+          </a:bodyPr>
+          <a:lstStyle/>
+          <a:p>
+            <a:r>
+              <a:rPr lang="en-US" dirty="0"/>
+              <a:t>Chicane: uniformly distribution of angle from 0~1mrad angle</a:t>
+            </a:r>
+          </a:p>
+        </p:txBody>
+      </p:sp>
+    </p:spTree>
+    <p:extLst>
+      <p:ext uri="{BB962C8B-B14F-4D97-AF65-F5344CB8AC3E}">
+        <p14:creationId xmlns:p14="http://schemas.microsoft.com/office/powerpoint/2010/main" val="1811776034"/>
+      </p:ext>
+    </p:extLst>
+  </p:cSld>
+  <p:clrMapOvr>
+    <a:masterClrMapping/>
+  </p:clrMapOvr>
+</p:sld>
+</file>
+
+<file path=ppt/slides/slide12.xml><?xml version="1.0" encoding="utf-8"?>
+<p:sld xmlns:a="http://schemas.openxmlformats.org/drawingml/2006/main" xmlns:r="http://schemas.openxmlformats.org/officeDocument/2006/relationships" xmlns:p="http://schemas.openxmlformats.org/presentationml/2006/main">
+  <p:cSld>
+    <p:spTree>
+      <p:nvGrpSpPr>
+        <p:cNvPr id="1" name=""/>
+        <p:cNvGrpSpPr/>
+        <p:nvPr/>
+      </p:nvGrpSpPr>
+      <p:grpSpPr>
+        <a:xfrm>
+          <a:off x="0" y="0"/>
+          <a:ext cx="0" cy="0"/>
+          <a:chOff x="0" y="0"/>
+          <a:chExt cx="0" cy="0"/>
+        </a:xfrm>
+      </p:grpSpPr>
       <p:pic>
         <p:nvPicPr>
           <p:cNvPr id="8" name="内容占位符 7" descr="图形用户界面&#10;&#10;AI 生成的内容可能不正确。">
@@ -4372,7 +4599,7 @@
             <a:fld id="{6F9FE219-8C91-41EA-B415-E8E26B7A5CDA}" type="slidenum">
               <a:rPr lang="zh-CN" altLang="en-US" smtClean="0"/>
               <a:pPr/>
-              <a:t>11</a:t>
+              <a:t>12</a:t>
             </a:fld>
             <a:endParaRPr lang="zh-CN" altLang="en-US" dirty="0"/>
           </a:p>
@@ -4585,7 +4812,7 @@
 </p:sld>
 </file>
 
-<file path=ppt/slides/slide12.xml><?xml version="1.0" encoding="utf-8"?>
+<file path=ppt/slides/slide13.xml><?xml version="1.0" encoding="utf-8"?>
 <p:sld xmlns:a="http://schemas.openxmlformats.org/drawingml/2006/main" xmlns:r="http://schemas.openxmlformats.org/officeDocument/2006/relationships" xmlns:p="http://schemas.openxmlformats.org/presentationml/2006/main">
   <p:cSld>
     <p:spTree>
@@ -4666,7 +4893,7 @@
             <a:fld id="{6F9FE219-8C91-41EA-B415-E8E26B7A5CDA}" type="slidenum">
               <a:rPr lang="zh-CN" altLang="en-US" smtClean="0"/>
               <a:pPr/>
-              <a:t>12</a:t>
+              <a:t>13</a:t>
             </a:fld>
             <a:endParaRPr lang="zh-CN" altLang="en-US" dirty="0"/>
           </a:p>
@@ -5116,7 +5343,7 @@
 </p:sld>
 </file>
 
-<file path=ppt/slides/slide13.xml><?xml version="1.0" encoding="utf-8"?>
+<file path=ppt/slides/slide14.xml><?xml version="1.0" encoding="utf-8"?>
 <p:sld xmlns:a="http://schemas.openxmlformats.org/drawingml/2006/main" xmlns:r="http://schemas.openxmlformats.org/officeDocument/2006/relationships" xmlns:p="http://schemas.openxmlformats.org/presentationml/2006/main">
   <p:cSld>
     <p:spTree>
@@ -5799,7 +6026,7 @@
             <a:fld id="{6F9FE219-8C91-41EA-B415-E8E26B7A5CDA}" type="slidenum">
               <a:rPr lang="zh-CN" altLang="en-US" smtClean="0"/>
               <a:pPr/>
-              <a:t>13</a:t>
+              <a:t>14</a:t>
             </a:fld>
             <a:endParaRPr lang="zh-CN" altLang="en-US" dirty="0"/>
           </a:p>
@@ -5818,7 +6045,7 @@
 </p:sld>
 </file>
 
-<file path=ppt/slides/slide14.xml><?xml version="1.0" encoding="utf-8"?>
+<file path=ppt/slides/slide15.xml><?xml version="1.0" encoding="utf-8"?>
 <p:sld xmlns:a="http://schemas.openxmlformats.org/drawingml/2006/main" xmlns:r="http://schemas.openxmlformats.org/officeDocument/2006/relationships" xmlns:p="http://schemas.openxmlformats.org/presentationml/2006/main">
   <p:cSld>
     <p:spTree>
@@ -5898,7 +6125,7 @@
             <a:fld id="{6F9FE219-8C91-41EA-B415-E8E26B7A5CDA}" type="slidenum">
               <a:rPr lang="zh-CN" altLang="en-US" smtClean="0"/>
               <a:pPr/>
-              <a:t>14</a:t>
+              <a:t>15</a:t>
             </a:fld>
             <a:endParaRPr lang="zh-CN" altLang="en-US" dirty="0"/>
           </a:p>
@@ -5947,7 +6174,7 @@
 </p:sld>
 </file>
 
-<file path=ppt/slides/slide15.xml><?xml version="1.0" encoding="utf-8"?>
+<file path=ppt/slides/slide16.xml><?xml version="1.0" encoding="utf-8"?>
 <p:sld xmlns:a="http://schemas.openxmlformats.org/drawingml/2006/main" xmlns:r="http://schemas.openxmlformats.org/officeDocument/2006/relationships" xmlns:p="http://schemas.openxmlformats.org/presentationml/2006/main">
   <p:cSld>
     <p:spTree>
@@ -6027,7 +6254,7 @@
             <a:fld id="{6F9FE219-8C91-41EA-B415-E8E26B7A5CDA}" type="slidenum">
               <a:rPr lang="zh-CN" altLang="en-US" smtClean="0"/>
               <a:pPr/>
-              <a:t>15</a:t>
+              <a:t>16</a:t>
             </a:fld>
             <a:endParaRPr lang="zh-CN" altLang="en-US" dirty="0"/>
           </a:p>
@@ -6886,7 +7113,7 @@
 </p:sld>
 </file>
 
-<file path=ppt/slides/slide16.xml><?xml version="1.0" encoding="utf-8"?>
+<file path=ppt/slides/slide17.xml><?xml version="1.0" encoding="utf-8"?>
 <p:sld xmlns:a="http://schemas.openxmlformats.org/drawingml/2006/main" xmlns:r="http://schemas.openxmlformats.org/officeDocument/2006/relationships" xmlns:p="http://schemas.openxmlformats.org/presentationml/2006/main">
   <p:cSld>
     <p:spTree>
@@ -6966,7 +7193,7 @@
             <a:fld id="{6F9FE219-8C91-41EA-B415-E8E26B7A5CDA}" type="slidenum">
               <a:rPr lang="zh-CN" altLang="en-US" smtClean="0"/>
               <a:pPr/>
-              <a:t>16</a:t>
+              <a:t>17</a:t>
             </a:fld>
             <a:endParaRPr lang="zh-CN" altLang="en-US" dirty="0"/>
           </a:p>
@@ -10754,8 +10981,8 @@
           </a:fontRef>
         </p:style>
       </p:cxnSp>
-      <mc:AlternateContent xmlns:mc="http://schemas.openxmlformats.org/markup-compatibility/2006">
-        <mc:Choice xmlns:a14="http://schemas.microsoft.com/office/drawing/2010/main" Requires="a14">
+      <mc:AlternateContent xmlns:mc="http://schemas.openxmlformats.org/markup-compatibility/2006" xmlns:a14="http://schemas.microsoft.com/office/drawing/2010/main">
+        <mc:Choice Requires="a14">
           <p:sp>
             <p:nvSpPr>
               <p:cNvPr id="14" name="文本框 13">
@@ -10827,7 +11054,7 @@
             </p:txBody>
           </p:sp>
         </mc:Choice>
-        <mc:Fallback>
+        <mc:Fallback xmlns="">
           <p:sp>
             <p:nvSpPr>
               <p:cNvPr id="14" name="文本框 13">
